--- a/slides/pptx/week17.pptx
+++ b/slides/pptx/week17.pptx
@@ -1391,7 +1391,7 @@
     <p:bg>
       <p:bgPr>
         <a:solidFill>
-          <a:srgbClr val="0E1726"/>
+          <a:srgbClr val="FFFFFF"/>
         </a:solidFill>
       </p:bgPr>
     </p:bg>
@@ -1409,38 +1409,9 @@
           <a:chExt cx="0" cy="0"/>
         </a:xfrm>
       </p:grpSpPr>
-      <p:sp>
-        <p:nvSpPr>
-          <p:cNvPr id="2" name="Shape 0"/>
-          <p:cNvSpPr/>
-          <p:nvPr/>
-        </p:nvSpPr>
-        <p:spPr>
-          <a:xfrm>
-            <a:off x="603504" y="411480"/>
-            <a:ext cx="1874520" cy="932688"/>
-          </a:xfrm>
-          <a:prstGeom prst="roundRect">
-            <a:avLst>
-              <a:gd name="adj" fmla="val 7843"/>
-            </a:avLst>
-          </a:prstGeom>
-          <a:solidFill>
-            <a:srgbClr val="FFFFFF"/>
-          </a:solidFill>
-          <a:ln/>
-          <a:effectLst>
-            <a:outerShdw sx="100000" sy="100000" kx="0" ky="0" algn="bl" rotWithShape="0" blurRad="101600" dist="38100" dir="5400000">
-              <a:srgbClr val="000000">
-                <a:alpha val="35000"/>
-              </a:srgbClr>
-            </a:outerShdw>
-          </a:effectLst>
-        </p:spPr>
-      </p:sp>
       <p:pic>
         <p:nvPicPr>
-          <p:cNvPr id="3" name="Image 0" descr="/Users/pop7/Library/CloudStorage/OneDrive-MonsterConnectCo.,Ltd/Lecture/KOSEN69 - software-security/slides/pptx/assets/logo-small.png">    </p:cNvPr>
+          <p:cNvPr id="2" name="Image 0" descr="/Users/pop7/Library/CloudStorage/OneDrive-MonsterConnectCo.,Ltd/Lecture/KOSEN69 - software-security/slides/pptx/assets/logo-small.png">    </p:cNvPr>
           <p:cNvPicPr>
             <a:picLocks noChangeAspect="1"/>
           </p:cNvPicPr>
@@ -1454,8 +1425,8 @@
         </p:blipFill>
         <p:spPr>
           <a:xfrm>
-            <a:off x="758952" y="566928"/>
-            <a:ext cx="1563624" cy="621792"/>
+            <a:off x="640080" y="502920"/>
+            <a:ext cx="1691640" cy="676656"/>
           </a:xfrm>
           <a:prstGeom prst="rect">
             <a:avLst/>
@@ -1464,7 +1435,7 @@
       </p:pic>
       <p:sp>
         <p:nvSpPr>
-          <p:cNvPr id="4" name="Text 1"/>
+          <p:cNvPr id="3" name="Text 0"/>
           <p:cNvSpPr/>
           <p:nvPr/>
         </p:nvSpPr>
@@ -1503,7 +1474,7 @@
       </p:sp>
       <p:sp>
         <p:nvSpPr>
-          <p:cNvPr id="5" name="Text 2"/>
+          <p:cNvPr id="4" name="Text 1"/>
           <p:cNvSpPr/>
           <p:nvPr/>
         </p:nvSpPr>
@@ -1531,7 +1502,7 @@
             <a:r>
               <a:rPr lang="en-US" sz="4000" b="1" dirty="0">
                 <a:solidFill>
-                  <a:srgbClr val="E6EDF3"/>
+                  <a:srgbClr val="1F2937"/>
                 </a:solidFill>
                 <a:latin typeface="Arial" pitchFamily="34" charset="0"/>
                 <a:ea typeface="Arial" pitchFamily="34" charset="-122"/>
@@ -1545,7 +1516,7 @@
       </p:sp>
       <p:sp>
         <p:nvSpPr>
-          <p:cNvPr id="6" name="Text 3"/>
+          <p:cNvPr id="5" name="Text 2"/>
           <p:cNvSpPr/>
           <p:nvPr/>
         </p:nvSpPr>
@@ -1570,7 +1541,7 @@
             <a:r>
               <a:rPr lang="en-US" sz="1400" dirty="0">
                 <a:solidFill>
-                  <a:srgbClr val="94A3B8"/>
+                  <a:srgbClr val="64748B"/>
                 </a:solidFill>
                 <a:latin typeface="Calibri" pitchFamily="34" charset="0"/>
                 <a:ea typeface="Calibri" pitchFamily="34" charset="-122"/>
@@ -1596,7 +1567,7 @@
     <p:bg>
       <p:bgPr>
         <a:solidFill>
-          <a:srgbClr val="0E1726"/>
+          <a:srgbClr val="FFFFFF"/>
         </a:solidFill>
       </p:bgPr>
     </p:bg>
@@ -1633,9 +1604,9 @@
           </a:solidFill>
           <a:ln/>
           <a:effectLst>
-            <a:outerShdw sx="100000" sy="100000" kx="0" ky="0" algn="bl" rotWithShape="0" blurRad="101600" dist="38100" dir="5400000">
+            <a:outerShdw sx="100000" sy="100000" kx="0" ky="0" algn="bl" rotWithShape="0" blurRad="76200" dist="25400" dir="5400000">
               <a:srgbClr val="000000">
-                <a:alpha val="35000"/>
+                <a:alpha val="12000"/>
               </a:srgbClr>
             </a:outerShdw>
           </a:effectLst>
@@ -1692,7 +1663,7 @@
             <a:r>
               <a:rPr lang="en-US" sz="2600" b="1" dirty="0">
                 <a:solidFill>
-                  <a:srgbClr val="E6EDF3"/>
+                  <a:srgbClr val="1F2937"/>
                 </a:solidFill>
                 <a:latin typeface="Arial" pitchFamily="34" charset="0"/>
                 <a:ea typeface="Arial" pitchFamily="34" charset="-122"/>
@@ -1721,13 +1692,13 @@
             </a:avLst>
           </a:prstGeom>
           <a:solidFill>
-            <a:srgbClr val="18243A"/>
+            <a:srgbClr val="F1F5F9"/>
           </a:solidFill>
           <a:ln/>
           <a:effectLst>
-            <a:outerShdw sx="100000" sy="100000" kx="0" ky="0" algn="bl" rotWithShape="0" blurRad="101600" dist="38100" dir="5400000">
+            <a:outerShdw sx="100000" sy="100000" kx="0" ky="0" algn="bl" rotWithShape="0" blurRad="76200" dist="25400" dir="5400000">
               <a:srgbClr val="000000">
-                <a:alpha val="35000"/>
+                <a:alpha val="12000"/>
               </a:srgbClr>
             </a:outerShdw>
           </a:effectLst>
@@ -1764,7 +1735,7 @@
             <a:r>
               <a:rPr lang="en-US" sz="1400" dirty="0">
                 <a:solidFill>
-                  <a:srgbClr val="E6EDF3"/>
+                  <a:srgbClr val="1F2937"/>
                 </a:solidFill>
                 <a:latin typeface="Calibri" pitchFamily="34" charset="0"/>
                 <a:ea typeface="Calibri" pitchFamily="34" charset="-122"/>
@@ -1785,7 +1756,7 @@
             <a:r>
               <a:rPr lang="en-US" sz="1400" dirty="0">
                 <a:solidFill>
-                  <a:srgbClr val="E6EDF3"/>
+                  <a:srgbClr val="1F2937"/>
                 </a:solidFill>
                 <a:latin typeface="Calibri" pitchFamily="34" charset="0"/>
                 <a:ea typeface="Calibri" pitchFamily="34" charset="-122"/>
@@ -1806,7 +1777,7 @@
             <a:r>
               <a:rPr lang="en-US" sz="1400" dirty="0">
                 <a:solidFill>
-                  <a:srgbClr val="E6EDF3"/>
+                  <a:srgbClr val="1F2937"/>
                 </a:solidFill>
                 <a:latin typeface="Calibri" pitchFamily="34" charset="0"/>
                 <a:ea typeface="Calibri" pitchFamily="34" charset="-122"/>
@@ -1845,7 +1816,7 @@
             <a:r>
               <a:rPr lang="en-US" sz="900" dirty="0">
                 <a:solidFill>
-                  <a:srgbClr val="94A3B8"/>
+                  <a:srgbClr val="64748B"/>
                 </a:solidFill>
                 <a:latin typeface="Calibri" pitchFamily="34" charset="0"/>
                 <a:ea typeface="Calibri" pitchFamily="34" charset="-122"/>
@@ -1857,38 +1828,9 @@
           </a:p>
         </p:txBody>
       </p:sp>
-      <p:sp>
-        <p:nvSpPr>
-          <p:cNvPr id="8" name="Shape 5"/>
-          <p:cNvSpPr/>
-          <p:nvPr/>
-        </p:nvSpPr>
-        <p:spPr>
-          <a:xfrm>
-            <a:off x="7772400" y="4590288"/>
-            <a:ext cx="969264" cy="475488"/>
-          </a:xfrm>
-          <a:prstGeom prst="roundRect">
-            <a:avLst>
-              <a:gd name="adj" fmla="val 11538"/>
-            </a:avLst>
-          </a:prstGeom>
-          <a:solidFill>
-            <a:srgbClr val="FFFFFF"/>
-          </a:solidFill>
-          <a:ln/>
-          <a:effectLst>
-            <a:outerShdw sx="100000" sy="100000" kx="0" ky="0" algn="bl" rotWithShape="0" blurRad="101600" dist="38100" dir="5400000">
-              <a:srgbClr val="000000">
-                <a:alpha val="35000"/>
-              </a:srgbClr>
-            </a:outerShdw>
-          </a:effectLst>
-        </p:spPr>
-      </p:sp>
       <p:pic>
         <p:nvPicPr>
-          <p:cNvPr id="9" name="Image 1" descr="/Users/pop7/Library/CloudStorage/OneDrive-MonsterConnectCo.,Ltd/Lecture/KOSEN69 - software-security/slides/pptx/assets/logo-small.png">    </p:cNvPr>
+          <p:cNvPr id="8" name="Image 1" descr="/Users/pop7/Library/CloudStorage/OneDrive-MonsterConnectCo.,Ltd/Lecture/KOSEN69 - software-security/slides/pptx/assets/logo-small.png">    </p:cNvPr>
           <p:cNvPicPr>
             <a:picLocks noChangeAspect="1"/>
           </p:cNvPicPr>
@@ -1902,7 +1844,7 @@
         </p:blipFill>
         <p:spPr>
           <a:xfrm>
-            <a:off x="7872984" y="4681728"/>
+            <a:off x="7882128" y="4700016"/>
             <a:ext cx="768096" cy="356616"/>
           </a:xfrm>
           <a:prstGeom prst="rect">
@@ -1924,7 +1866,7 @@
     <p:bg>
       <p:bgPr>
         <a:solidFill>
-          <a:srgbClr val="0E1726"/>
+          <a:srgbClr val="FFFFFF"/>
         </a:solidFill>
       </p:bgPr>
     </p:bg>
@@ -1961,9 +1903,9 @@
           </a:solidFill>
           <a:ln/>
           <a:effectLst>
-            <a:outerShdw sx="100000" sy="100000" kx="0" ky="0" algn="bl" rotWithShape="0" blurRad="101600" dist="38100" dir="5400000">
+            <a:outerShdw sx="100000" sy="100000" kx="0" ky="0" algn="bl" rotWithShape="0" blurRad="76200" dist="25400" dir="5400000">
               <a:srgbClr val="000000">
-                <a:alpha val="35000"/>
+                <a:alpha val="12000"/>
               </a:srgbClr>
             </a:outerShdw>
           </a:effectLst>
@@ -2020,7 +1962,7 @@
             <a:r>
               <a:rPr lang="en-US" sz="2600" b="1" dirty="0">
                 <a:solidFill>
-                  <a:srgbClr val="E6EDF3"/>
+                  <a:srgbClr val="1F2937"/>
                 </a:solidFill>
                 <a:latin typeface="Arial" pitchFamily="34" charset="0"/>
                 <a:ea typeface="Arial" pitchFamily="34" charset="-122"/>
@@ -2082,7 +2024,7 @@
                   <a:tcPr marL="76200" marR="76200" marT="38100" marB="38100" anchor="ctr">
                     <a:lnL w="12700" cap="flat" cmpd="sng" algn="ctr">
                       <a:solidFill>
-                        <a:srgbClr val="0E1726"/>
+                        <a:srgbClr val="FFFFFF"/>
                       </a:solidFill>
                       <a:prstDash val="solid"/>
                       <a:round/>
@@ -2091,7 +2033,7 @@
                     </a:lnL>
                     <a:lnR w="12700" cap="flat" cmpd="sng" algn="ctr">
                       <a:solidFill>
-                        <a:srgbClr val="0E1726"/>
+                        <a:srgbClr val="FFFFFF"/>
                       </a:solidFill>
                       <a:prstDash val="solid"/>
                       <a:round/>
@@ -2100,7 +2042,7 @@
                     </a:lnR>
                     <a:lnT w="12700" cap="flat" cmpd="sng" algn="ctr">
                       <a:solidFill>
-                        <a:srgbClr val="0E1726"/>
+                        <a:srgbClr val="FFFFFF"/>
                       </a:solidFill>
                       <a:prstDash val="solid"/>
                       <a:round/>
@@ -2109,7 +2051,7 @@
                     </a:lnT>
                     <a:lnB w="12700" cap="flat" cmpd="sng" algn="ctr">
                       <a:solidFill>
-                        <a:srgbClr val="0E1726"/>
+                        <a:srgbClr val="FFFFFF"/>
                       </a:solidFill>
                       <a:prstDash val="solid"/>
                       <a:round/>
@@ -2143,7 +2085,7 @@
                   <a:tcPr marL="76200" marR="76200" marT="38100" marB="38100" anchor="ctr">
                     <a:lnL w="12700" cap="flat" cmpd="sng" algn="ctr">
                       <a:solidFill>
-                        <a:srgbClr val="0E1726"/>
+                        <a:srgbClr val="FFFFFF"/>
                       </a:solidFill>
                       <a:prstDash val="solid"/>
                       <a:round/>
@@ -2152,7 +2094,7 @@
                     </a:lnL>
                     <a:lnR w="12700" cap="flat" cmpd="sng" algn="ctr">
                       <a:solidFill>
-                        <a:srgbClr val="0E1726"/>
+                        <a:srgbClr val="FFFFFF"/>
                       </a:solidFill>
                       <a:prstDash val="solid"/>
                       <a:round/>
@@ -2161,7 +2103,7 @@
                     </a:lnR>
                     <a:lnT w="12700" cap="flat" cmpd="sng" algn="ctr">
                       <a:solidFill>
-                        <a:srgbClr val="0E1726"/>
+                        <a:srgbClr val="FFFFFF"/>
                       </a:solidFill>
                       <a:prstDash val="solid"/>
                       <a:round/>
@@ -2170,7 +2112,7 @@
                     </a:lnT>
                     <a:lnB w="12700" cap="flat" cmpd="sng" algn="ctr">
                       <a:solidFill>
-                        <a:srgbClr val="0E1726"/>
+                        <a:srgbClr val="FFFFFF"/>
                       </a:solidFill>
                       <a:prstDash val="solid"/>
                       <a:round/>
@@ -2204,7 +2146,7 @@
                   <a:tcPr marL="76200" marR="76200" marT="38100" marB="38100" anchor="ctr">
                     <a:lnL w="12700" cap="flat" cmpd="sng" algn="ctr">
                       <a:solidFill>
-                        <a:srgbClr val="0E1726"/>
+                        <a:srgbClr val="FFFFFF"/>
                       </a:solidFill>
                       <a:prstDash val="solid"/>
                       <a:round/>
@@ -2213,7 +2155,7 @@
                     </a:lnL>
                     <a:lnR w="12700" cap="flat" cmpd="sng" algn="ctr">
                       <a:solidFill>
-                        <a:srgbClr val="0E1726"/>
+                        <a:srgbClr val="FFFFFF"/>
                       </a:solidFill>
                       <a:prstDash val="solid"/>
                       <a:round/>
@@ -2222,7 +2164,7 @@
                     </a:lnR>
                     <a:lnT w="12700" cap="flat" cmpd="sng" algn="ctr">
                       <a:solidFill>
-                        <a:srgbClr val="0E1726"/>
+                        <a:srgbClr val="FFFFFF"/>
                       </a:solidFill>
                       <a:prstDash val="solid"/>
                       <a:round/>
@@ -2231,7 +2173,7 @@
                     </a:lnT>
                     <a:lnB w="12700" cap="flat" cmpd="sng" algn="ctr">
                       <a:solidFill>
-                        <a:srgbClr val="0E1726"/>
+                        <a:srgbClr val="FFFFFF"/>
                       </a:solidFill>
                       <a:prstDash val="solid"/>
                       <a:round/>
@@ -2256,7 +2198,7 @@
                       <a:r>
                         <a:rPr lang="en-US" sz="1200" dirty="0">
                           <a:solidFill>
-                            <a:srgbClr val="E6EDF3"/>
+                            <a:srgbClr val="1F2937"/>
                           </a:solidFill>
                         </a:rPr>
                         <a:t>10</a:t>
@@ -2267,7 +2209,7 @@
                   <a:tcPr marL="76200" marR="76200" marT="38100" marB="38100" anchor="ctr">
                     <a:lnL w="12700" cap="flat" cmpd="sng" algn="ctr">
                       <a:solidFill>
-                        <a:srgbClr val="0E1726"/>
+                        <a:srgbClr val="FFFFFF"/>
                       </a:solidFill>
                       <a:prstDash val="solid"/>
                       <a:round/>
@@ -2276,7 +2218,7 @@
                     </a:lnL>
                     <a:lnR w="12700" cap="flat" cmpd="sng" algn="ctr">
                       <a:solidFill>
-                        <a:srgbClr val="0E1726"/>
+                        <a:srgbClr val="FFFFFF"/>
                       </a:solidFill>
                       <a:prstDash val="solid"/>
                       <a:round/>
@@ -2285,7 +2227,7 @@
                     </a:lnR>
                     <a:lnT w="12700" cap="flat" cmpd="sng" algn="ctr">
                       <a:solidFill>
-                        <a:srgbClr val="0E1726"/>
+                        <a:srgbClr val="FFFFFF"/>
                       </a:solidFill>
                       <a:prstDash val="solid"/>
                       <a:round/>
@@ -2294,7 +2236,7 @@
                     </a:lnT>
                     <a:lnB w="12700" cap="flat" cmpd="sng" algn="ctr">
                       <a:solidFill>
-                        <a:srgbClr val="0E1726"/>
+                        <a:srgbClr val="FFFFFF"/>
                       </a:solidFill>
                       <a:prstDash val="solid"/>
                       <a:round/>
@@ -2302,7 +2244,7 @@
                       <a:tailEnd type="none" w="med" len="med"/>
                     </a:lnB>
                     <a:solidFill>
-                      <a:srgbClr val="18243A"/>
+                      <a:srgbClr val="F1F5F9"/>
                     </a:solidFill>
                   </a:tcPr>
                 </a:tc>
@@ -2317,7 +2259,7 @@
                       <a:r>
                         <a:rPr lang="en-US" sz="1200" dirty="0">
                           <a:solidFill>
-                            <a:srgbClr val="E6EDF3"/>
+                            <a:srgbClr val="1F2937"/>
                           </a:solidFill>
                         </a:rPr>
                         <a:t>API security</a:t>
@@ -2328,7 +2270,7 @@
                   <a:tcPr marL="76200" marR="76200" marT="38100" marB="38100" anchor="ctr">
                     <a:lnL w="12700" cap="flat" cmpd="sng" algn="ctr">
                       <a:solidFill>
-                        <a:srgbClr val="0E1726"/>
+                        <a:srgbClr val="FFFFFF"/>
                       </a:solidFill>
                       <a:prstDash val="solid"/>
                       <a:round/>
@@ -2337,7 +2279,7 @@
                     </a:lnL>
                     <a:lnR w="12700" cap="flat" cmpd="sng" algn="ctr">
                       <a:solidFill>
-                        <a:srgbClr val="0E1726"/>
+                        <a:srgbClr val="FFFFFF"/>
                       </a:solidFill>
                       <a:prstDash val="solid"/>
                       <a:round/>
@@ -2346,7 +2288,7 @@
                     </a:lnR>
                     <a:lnT w="12700" cap="flat" cmpd="sng" algn="ctr">
                       <a:solidFill>
-                        <a:srgbClr val="0E1726"/>
+                        <a:srgbClr val="FFFFFF"/>
                       </a:solidFill>
                       <a:prstDash val="solid"/>
                       <a:round/>
@@ -2355,7 +2297,7 @@
                     </a:lnT>
                     <a:lnB w="12700" cap="flat" cmpd="sng" algn="ctr">
                       <a:solidFill>
-                        <a:srgbClr val="0E1726"/>
+                        <a:srgbClr val="FFFFFF"/>
                       </a:solidFill>
                       <a:prstDash val="solid"/>
                       <a:round/>
@@ -2363,7 +2305,7 @@
                       <a:tailEnd type="none" w="med" len="med"/>
                     </a:lnB>
                     <a:solidFill>
-                      <a:srgbClr val="18243A"/>
+                      <a:srgbClr val="F1F5F9"/>
                     </a:solidFill>
                   </a:tcPr>
                 </a:tc>
@@ -2378,7 +2320,7 @@
                       <a:r>
                         <a:rPr lang="en-US" sz="1200" dirty="0">
                           <a:solidFill>
-                            <a:srgbClr val="E6EDF3"/>
+                            <a:srgbClr val="1F2937"/>
                           </a:solidFill>
                         </a:rPr>
                         <a:t>check ownership; bind intended fields</a:t>
@@ -2389,7 +2331,7 @@
                   <a:tcPr marL="76200" marR="76200" marT="38100" marB="38100" anchor="ctr">
                     <a:lnL w="12700" cap="flat" cmpd="sng" algn="ctr">
                       <a:solidFill>
-                        <a:srgbClr val="0E1726"/>
+                        <a:srgbClr val="FFFFFF"/>
                       </a:solidFill>
                       <a:prstDash val="solid"/>
                       <a:round/>
@@ -2398,7 +2340,7 @@
                     </a:lnL>
                     <a:lnR w="12700" cap="flat" cmpd="sng" algn="ctr">
                       <a:solidFill>
-                        <a:srgbClr val="0E1726"/>
+                        <a:srgbClr val="FFFFFF"/>
                       </a:solidFill>
                       <a:prstDash val="solid"/>
                       <a:round/>
@@ -2407,7 +2349,7 @@
                     </a:lnR>
                     <a:lnT w="12700" cap="flat" cmpd="sng" algn="ctr">
                       <a:solidFill>
-                        <a:srgbClr val="0E1726"/>
+                        <a:srgbClr val="FFFFFF"/>
                       </a:solidFill>
                       <a:prstDash val="solid"/>
                       <a:round/>
@@ -2416,7 +2358,7 @@
                     </a:lnT>
                     <a:lnB w="12700" cap="flat" cmpd="sng" algn="ctr">
                       <a:solidFill>
-                        <a:srgbClr val="0E1726"/>
+                        <a:srgbClr val="FFFFFF"/>
                       </a:solidFill>
                       <a:prstDash val="solid"/>
                       <a:round/>
@@ -2424,7 +2366,7 @@
                       <a:tailEnd type="none" w="med" len="med"/>
                     </a:lnB>
                     <a:solidFill>
-                      <a:srgbClr val="18243A"/>
+                      <a:srgbClr val="F1F5F9"/>
                     </a:solidFill>
                   </a:tcPr>
                 </a:tc>
@@ -2441,7 +2383,7 @@
                       <a:r>
                         <a:rPr lang="en-US" sz="1200" dirty="0">
                           <a:solidFill>
-                            <a:srgbClr val="E6EDF3"/>
+                            <a:srgbClr val="1F2937"/>
                           </a:solidFill>
                         </a:rPr>
                         <a:t>11</a:t>
@@ -2452,7 +2394,7 @@
                   <a:tcPr marL="76200" marR="76200" marT="38100" marB="38100" anchor="ctr">
                     <a:lnL w="12700" cap="flat" cmpd="sng" algn="ctr">
                       <a:solidFill>
-                        <a:srgbClr val="0E1726"/>
+                        <a:srgbClr val="FFFFFF"/>
                       </a:solidFill>
                       <a:prstDash val="solid"/>
                       <a:round/>
@@ -2461,7 +2403,7 @@
                     </a:lnL>
                     <a:lnR w="12700" cap="flat" cmpd="sng" algn="ctr">
                       <a:solidFill>
-                        <a:srgbClr val="0E1726"/>
+                        <a:srgbClr val="FFFFFF"/>
                       </a:solidFill>
                       <a:prstDash val="solid"/>
                       <a:round/>
@@ -2470,7 +2412,7 @@
                     </a:lnR>
                     <a:lnT w="12700" cap="flat" cmpd="sng" algn="ctr">
                       <a:solidFill>
-                        <a:srgbClr val="0E1726"/>
+                        <a:srgbClr val="FFFFFF"/>
                       </a:solidFill>
                       <a:prstDash val="solid"/>
                       <a:round/>
@@ -2479,7 +2421,7 @@
                     </a:lnT>
                     <a:lnB w="12700" cap="flat" cmpd="sng" algn="ctr">
                       <a:solidFill>
-                        <a:srgbClr val="0E1726"/>
+                        <a:srgbClr val="FFFFFF"/>
                       </a:solidFill>
                       <a:prstDash val="solid"/>
                       <a:round/>
@@ -2487,7 +2429,7 @@
                       <a:tailEnd type="none" w="med" len="med"/>
                     </a:lnB>
                     <a:solidFill>
-                      <a:srgbClr val="1E2B45"/>
+                      <a:srgbClr val="E8EDF3"/>
                     </a:solidFill>
                   </a:tcPr>
                 </a:tc>
@@ -2502,7 +2444,7 @@
                       <a:r>
                         <a:rPr lang="en-US" sz="1200" dirty="0">
                           <a:solidFill>
-                            <a:srgbClr val="E6EDF3"/>
+                            <a:srgbClr val="1F2937"/>
                           </a:solidFill>
                         </a:rPr>
                         <a:t>Memory safety</a:t>
@@ -2513,7 +2455,7 @@
                   <a:tcPr marL="76200" marR="76200" marT="38100" marB="38100" anchor="ctr">
                     <a:lnL w="12700" cap="flat" cmpd="sng" algn="ctr">
                       <a:solidFill>
-                        <a:srgbClr val="0E1726"/>
+                        <a:srgbClr val="FFFFFF"/>
                       </a:solidFill>
                       <a:prstDash val="solid"/>
                       <a:round/>
@@ -2522,7 +2464,7 @@
                     </a:lnL>
                     <a:lnR w="12700" cap="flat" cmpd="sng" algn="ctr">
                       <a:solidFill>
-                        <a:srgbClr val="0E1726"/>
+                        <a:srgbClr val="FFFFFF"/>
                       </a:solidFill>
                       <a:prstDash val="solid"/>
                       <a:round/>
@@ -2531,7 +2473,7 @@
                     </a:lnR>
                     <a:lnT w="12700" cap="flat" cmpd="sng" algn="ctr">
                       <a:solidFill>
-                        <a:srgbClr val="0E1726"/>
+                        <a:srgbClr val="FFFFFF"/>
                       </a:solidFill>
                       <a:prstDash val="solid"/>
                       <a:round/>
@@ -2540,7 +2482,7 @@
                     </a:lnT>
                     <a:lnB w="12700" cap="flat" cmpd="sng" algn="ctr">
                       <a:solidFill>
-                        <a:srgbClr val="0E1726"/>
+                        <a:srgbClr val="FFFFFF"/>
                       </a:solidFill>
                       <a:prstDash val="solid"/>
                       <a:round/>
@@ -2548,7 +2490,7 @@
                       <a:tailEnd type="none" w="med" len="med"/>
                     </a:lnB>
                     <a:solidFill>
-                      <a:srgbClr val="1E2B45"/>
+                      <a:srgbClr val="E8EDF3"/>
                     </a:solidFill>
                   </a:tcPr>
                 </a:tc>
@@ -2563,7 +2505,7 @@
                       <a:r>
                         <a:rPr lang="en-US" sz="1200" dirty="0">
                           <a:solidFill>
-                            <a:srgbClr val="E6EDF3"/>
+                            <a:srgbClr val="1F2937"/>
                           </a:solidFill>
                         </a:rPr>
                         <a:t>fuzz, exploit, go memory-safe</a:t>
@@ -2574,7 +2516,7 @@
                   <a:tcPr marL="76200" marR="76200" marT="38100" marB="38100" anchor="ctr">
                     <a:lnL w="12700" cap="flat" cmpd="sng" algn="ctr">
                       <a:solidFill>
-                        <a:srgbClr val="0E1726"/>
+                        <a:srgbClr val="FFFFFF"/>
                       </a:solidFill>
                       <a:prstDash val="solid"/>
                       <a:round/>
@@ -2583,7 +2525,7 @@
                     </a:lnL>
                     <a:lnR w="12700" cap="flat" cmpd="sng" algn="ctr">
                       <a:solidFill>
-                        <a:srgbClr val="0E1726"/>
+                        <a:srgbClr val="FFFFFF"/>
                       </a:solidFill>
                       <a:prstDash val="solid"/>
                       <a:round/>
@@ -2592,7 +2534,7 @@
                     </a:lnR>
                     <a:lnT w="12700" cap="flat" cmpd="sng" algn="ctr">
                       <a:solidFill>
-                        <a:srgbClr val="0E1726"/>
+                        <a:srgbClr val="FFFFFF"/>
                       </a:solidFill>
                       <a:prstDash val="solid"/>
                       <a:round/>
@@ -2601,7 +2543,7 @@
                     </a:lnT>
                     <a:lnB w="12700" cap="flat" cmpd="sng" algn="ctr">
                       <a:solidFill>
-                        <a:srgbClr val="0E1726"/>
+                        <a:srgbClr val="FFFFFF"/>
                       </a:solidFill>
                       <a:prstDash val="solid"/>
                       <a:round/>
@@ -2609,7 +2551,7 @@
                       <a:tailEnd type="none" w="med" len="med"/>
                     </a:lnB>
                     <a:solidFill>
-                      <a:srgbClr val="1E2B45"/>
+                      <a:srgbClr val="E8EDF3"/>
                     </a:solidFill>
                   </a:tcPr>
                 </a:tc>
@@ -2626,7 +2568,7 @@
                       <a:r>
                         <a:rPr lang="en-US" sz="1200" dirty="0">
                           <a:solidFill>
-                            <a:srgbClr val="E6EDF3"/>
+                            <a:srgbClr val="1F2937"/>
                           </a:solidFill>
                         </a:rPr>
                         <a:t>12</a:t>
@@ -2637,7 +2579,7 @@
                   <a:tcPr marL="76200" marR="76200" marT="38100" marB="38100" anchor="ctr">
                     <a:lnL w="12700" cap="flat" cmpd="sng" algn="ctr">
                       <a:solidFill>
-                        <a:srgbClr val="0E1726"/>
+                        <a:srgbClr val="FFFFFF"/>
                       </a:solidFill>
                       <a:prstDash val="solid"/>
                       <a:round/>
@@ -2646,7 +2588,7 @@
                     </a:lnL>
                     <a:lnR w="12700" cap="flat" cmpd="sng" algn="ctr">
                       <a:solidFill>
-                        <a:srgbClr val="0E1726"/>
+                        <a:srgbClr val="FFFFFF"/>
                       </a:solidFill>
                       <a:prstDash val="solid"/>
                       <a:round/>
@@ -2655,7 +2597,7 @@
                     </a:lnR>
                     <a:lnT w="12700" cap="flat" cmpd="sng" algn="ctr">
                       <a:solidFill>
-                        <a:srgbClr val="0E1726"/>
+                        <a:srgbClr val="FFFFFF"/>
                       </a:solidFill>
                       <a:prstDash val="solid"/>
                       <a:round/>
@@ -2664,7 +2606,7 @@
                     </a:lnT>
                     <a:lnB w="12700" cap="flat" cmpd="sng" algn="ctr">
                       <a:solidFill>
-                        <a:srgbClr val="0E1726"/>
+                        <a:srgbClr val="FFFFFF"/>
                       </a:solidFill>
                       <a:prstDash val="solid"/>
                       <a:round/>
@@ -2672,7 +2614,7 @@
                       <a:tailEnd type="none" w="med" len="med"/>
                     </a:lnB>
                     <a:solidFill>
-                      <a:srgbClr val="18243A"/>
+                      <a:srgbClr val="F1F5F9"/>
                     </a:solidFill>
                   </a:tcPr>
                 </a:tc>
@@ -2687,7 +2629,7 @@
                       <a:r>
                         <a:rPr lang="en-US" sz="1200" dirty="0">
                           <a:solidFill>
-                            <a:srgbClr val="E6EDF3"/>
+                            <a:srgbClr val="1F2937"/>
                           </a:solidFill>
                         </a:rPr>
                         <a:t>Supply chain</a:t>
@@ -2698,7 +2640,7 @@
                   <a:tcPr marL="76200" marR="76200" marT="38100" marB="38100" anchor="ctr">
                     <a:lnL w="12700" cap="flat" cmpd="sng" algn="ctr">
                       <a:solidFill>
-                        <a:srgbClr val="0E1726"/>
+                        <a:srgbClr val="FFFFFF"/>
                       </a:solidFill>
                       <a:prstDash val="solid"/>
                       <a:round/>
@@ -2707,7 +2649,7 @@
                     </a:lnL>
                     <a:lnR w="12700" cap="flat" cmpd="sng" algn="ctr">
                       <a:solidFill>
-                        <a:srgbClr val="0E1726"/>
+                        <a:srgbClr val="FFFFFF"/>
                       </a:solidFill>
                       <a:prstDash val="solid"/>
                       <a:round/>
@@ -2716,7 +2658,7 @@
                     </a:lnR>
                     <a:lnT w="12700" cap="flat" cmpd="sng" algn="ctr">
                       <a:solidFill>
-                        <a:srgbClr val="0E1726"/>
+                        <a:srgbClr val="FFFFFF"/>
                       </a:solidFill>
                       <a:prstDash val="solid"/>
                       <a:round/>
@@ -2725,7 +2667,7 @@
                     </a:lnT>
                     <a:lnB w="12700" cap="flat" cmpd="sng" algn="ctr">
                       <a:solidFill>
-                        <a:srgbClr val="0E1726"/>
+                        <a:srgbClr val="FFFFFF"/>
                       </a:solidFill>
                       <a:prstDash val="solid"/>
                       <a:round/>
@@ -2733,7 +2675,7 @@
                       <a:tailEnd type="none" w="med" len="med"/>
                     </a:lnB>
                     <a:solidFill>
-                      <a:srgbClr val="18243A"/>
+                      <a:srgbClr val="F1F5F9"/>
                     </a:solidFill>
                   </a:tcPr>
                 </a:tc>
@@ -2748,7 +2690,7 @@
                       <a:r>
                         <a:rPr lang="en-US" sz="1200" dirty="0">
                           <a:solidFill>
-                            <a:srgbClr val="E6EDF3"/>
+                            <a:srgbClr val="1F2937"/>
                           </a:solidFill>
                         </a:rPr>
                         <a:t>SBOM, SLSA, sign &amp; verify</a:t>
@@ -2759,7 +2701,7 @@
                   <a:tcPr marL="76200" marR="76200" marT="38100" marB="38100" anchor="ctr">
                     <a:lnL w="12700" cap="flat" cmpd="sng" algn="ctr">
                       <a:solidFill>
-                        <a:srgbClr val="0E1726"/>
+                        <a:srgbClr val="FFFFFF"/>
                       </a:solidFill>
                       <a:prstDash val="solid"/>
                       <a:round/>
@@ -2768,7 +2710,7 @@
                     </a:lnL>
                     <a:lnR w="12700" cap="flat" cmpd="sng" algn="ctr">
                       <a:solidFill>
-                        <a:srgbClr val="0E1726"/>
+                        <a:srgbClr val="FFFFFF"/>
                       </a:solidFill>
                       <a:prstDash val="solid"/>
                       <a:round/>
@@ -2777,7 +2719,7 @@
                     </a:lnR>
                     <a:lnT w="12700" cap="flat" cmpd="sng" algn="ctr">
                       <a:solidFill>
-                        <a:srgbClr val="0E1726"/>
+                        <a:srgbClr val="FFFFFF"/>
                       </a:solidFill>
                       <a:prstDash val="solid"/>
                       <a:round/>
@@ -2786,7 +2728,7 @@
                     </a:lnT>
                     <a:lnB w="12700" cap="flat" cmpd="sng" algn="ctr">
                       <a:solidFill>
-                        <a:srgbClr val="0E1726"/>
+                        <a:srgbClr val="FFFFFF"/>
                       </a:solidFill>
                       <a:prstDash val="solid"/>
                       <a:round/>
@@ -2794,7 +2736,7 @@
                       <a:tailEnd type="none" w="med" len="med"/>
                     </a:lnB>
                     <a:solidFill>
-                      <a:srgbClr val="18243A"/>
+                      <a:srgbClr val="F1F5F9"/>
                     </a:solidFill>
                   </a:tcPr>
                 </a:tc>
@@ -2811,7 +2753,7 @@
                       <a:r>
                         <a:rPr lang="en-US" sz="1200" dirty="0">
                           <a:solidFill>
-                            <a:srgbClr val="E6EDF3"/>
+                            <a:srgbClr val="1F2937"/>
                           </a:solidFill>
                         </a:rPr>
                         <a:t>13</a:t>
@@ -2822,7 +2764,7 @@
                   <a:tcPr marL="76200" marR="76200" marT="38100" marB="38100" anchor="ctr">
                     <a:lnL w="12700" cap="flat" cmpd="sng" algn="ctr">
                       <a:solidFill>
-                        <a:srgbClr val="0E1726"/>
+                        <a:srgbClr val="FFFFFF"/>
                       </a:solidFill>
                       <a:prstDash val="solid"/>
                       <a:round/>
@@ -2831,7 +2773,7 @@
                     </a:lnL>
                     <a:lnR w="12700" cap="flat" cmpd="sng" algn="ctr">
                       <a:solidFill>
-                        <a:srgbClr val="0E1726"/>
+                        <a:srgbClr val="FFFFFF"/>
                       </a:solidFill>
                       <a:prstDash val="solid"/>
                       <a:round/>
@@ -2840,7 +2782,7 @@
                     </a:lnR>
                     <a:lnT w="12700" cap="flat" cmpd="sng" algn="ctr">
                       <a:solidFill>
-                        <a:srgbClr val="0E1726"/>
+                        <a:srgbClr val="FFFFFF"/>
                       </a:solidFill>
                       <a:prstDash val="solid"/>
                       <a:round/>
@@ -2849,7 +2791,7 @@
                     </a:lnT>
                     <a:lnB w="12700" cap="flat" cmpd="sng" algn="ctr">
                       <a:solidFill>
-                        <a:srgbClr val="0E1726"/>
+                        <a:srgbClr val="FFFFFF"/>
                       </a:solidFill>
                       <a:prstDash val="solid"/>
                       <a:round/>
@@ -2857,7 +2799,7 @@
                       <a:tailEnd type="none" w="med" len="med"/>
                     </a:lnB>
                     <a:solidFill>
-                      <a:srgbClr val="1E2B45"/>
+                      <a:srgbClr val="E8EDF3"/>
                     </a:solidFill>
                   </a:tcPr>
                 </a:tc>
@@ -2872,7 +2814,7 @@
                       <a:r>
                         <a:rPr lang="en-US" sz="1200" dirty="0">
                           <a:solidFill>
-                            <a:srgbClr val="E6EDF3"/>
+                            <a:srgbClr val="1F2937"/>
                           </a:solidFill>
                         </a:rPr>
                         <a:t>Cloud/container</a:t>
@@ -2883,7 +2825,7 @@
                   <a:tcPr marL="76200" marR="76200" marT="38100" marB="38100" anchor="ctr">
                     <a:lnL w="12700" cap="flat" cmpd="sng" algn="ctr">
                       <a:solidFill>
-                        <a:srgbClr val="0E1726"/>
+                        <a:srgbClr val="FFFFFF"/>
                       </a:solidFill>
                       <a:prstDash val="solid"/>
                       <a:round/>
@@ -2892,7 +2834,7 @@
                     </a:lnL>
                     <a:lnR w="12700" cap="flat" cmpd="sng" algn="ctr">
                       <a:solidFill>
-                        <a:srgbClr val="0E1726"/>
+                        <a:srgbClr val="FFFFFF"/>
                       </a:solidFill>
                       <a:prstDash val="solid"/>
                       <a:round/>
@@ -2901,7 +2843,7 @@
                     </a:lnR>
                     <a:lnT w="12700" cap="flat" cmpd="sng" algn="ctr">
                       <a:solidFill>
-                        <a:srgbClr val="0E1726"/>
+                        <a:srgbClr val="FFFFFF"/>
                       </a:solidFill>
                       <a:prstDash val="solid"/>
                       <a:round/>
@@ -2910,7 +2852,7 @@
                     </a:lnT>
                     <a:lnB w="12700" cap="flat" cmpd="sng" algn="ctr">
                       <a:solidFill>
-                        <a:srgbClr val="0E1726"/>
+                        <a:srgbClr val="FFFFFF"/>
                       </a:solidFill>
                       <a:prstDash val="solid"/>
                       <a:round/>
@@ -2918,7 +2860,7 @@
                       <a:tailEnd type="none" w="med" len="med"/>
                     </a:lnB>
                     <a:solidFill>
-                      <a:srgbClr val="1E2B45"/>
+                      <a:srgbClr val="E8EDF3"/>
                     </a:solidFill>
                   </a:tcPr>
                 </a:tc>
@@ -2933,7 +2875,7 @@
                       <a:r>
                         <a:rPr lang="en-US" sz="1200" dirty="0">
                           <a:solidFill>
-                            <a:srgbClr val="E6EDF3"/>
+                            <a:srgbClr val="1F2937"/>
                           </a:solidFill>
                         </a:rPr>
                         <a:t>least privilege, no misconfig</a:t>
@@ -2944,7 +2886,7 @@
                   <a:tcPr marL="76200" marR="76200" marT="38100" marB="38100" anchor="ctr">
                     <a:lnL w="12700" cap="flat" cmpd="sng" algn="ctr">
                       <a:solidFill>
-                        <a:srgbClr val="0E1726"/>
+                        <a:srgbClr val="FFFFFF"/>
                       </a:solidFill>
                       <a:prstDash val="solid"/>
                       <a:round/>
@@ -2953,7 +2895,7 @@
                     </a:lnL>
                     <a:lnR w="12700" cap="flat" cmpd="sng" algn="ctr">
                       <a:solidFill>
-                        <a:srgbClr val="0E1726"/>
+                        <a:srgbClr val="FFFFFF"/>
                       </a:solidFill>
                       <a:prstDash val="solid"/>
                       <a:round/>
@@ -2962,7 +2904,7 @@
                     </a:lnR>
                     <a:lnT w="12700" cap="flat" cmpd="sng" algn="ctr">
                       <a:solidFill>
-                        <a:srgbClr val="0E1726"/>
+                        <a:srgbClr val="FFFFFF"/>
                       </a:solidFill>
                       <a:prstDash val="solid"/>
                       <a:round/>
@@ -2971,7 +2913,7 @@
                     </a:lnT>
                     <a:lnB w="12700" cap="flat" cmpd="sng" algn="ctr">
                       <a:solidFill>
-                        <a:srgbClr val="0E1726"/>
+                        <a:srgbClr val="FFFFFF"/>
                       </a:solidFill>
                       <a:prstDash val="solid"/>
                       <a:round/>
@@ -2979,7 +2921,7 @@
                       <a:tailEnd type="none" w="med" len="med"/>
                     </a:lnB>
                     <a:solidFill>
-                      <a:srgbClr val="1E2B45"/>
+                      <a:srgbClr val="E8EDF3"/>
                     </a:solidFill>
                   </a:tcPr>
                 </a:tc>
@@ -2996,7 +2938,7 @@
                       <a:r>
                         <a:rPr lang="en-US" sz="1200" dirty="0">
                           <a:solidFill>
-                            <a:srgbClr val="E6EDF3"/>
+                            <a:srgbClr val="1F2937"/>
                           </a:solidFill>
                         </a:rPr>
                         <a:t>14</a:t>
@@ -3007,7 +2949,7 @@
                   <a:tcPr marL="76200" marR="76200" marT="38100" marB="38100" anchor="ctr">
                     <a:lnL w="12700" cap="flat" cmpd="sng" algn="ctr">
                       <a:solidFill>
-                        <a:srgbClr val="0E1726"/>
+                        <a:srgbClr val="FFFFFF"/>
                       </a:solidFill>
                       <a:prstDash val="solid"/>
                       <a:round/>
@@ -3016,7 +2958,7 @@
                     </a:lnL>
                     <a:lnR w="12700" cap="flat" cmpd="sng" algn="ctr">
                       <a:solidFill>
-                        <a:srgbClr val="0E1726"/>
+                        <a:srgbClr val="FFFFFF"/>
                       </a:solidFill>
                       <a:prstDash val="solid"/>
                       <a:round/>
@@ -3025,7 +2967,7 @@
                     </a:lnR>
                     <a:lnT w="12700" cap="flat" cmpd="sng" algn="ctr">
                       <a:solidFill>
-                        <a:srgbClr val="0E1726"/>
+                        <a:srgbClr val="FFFFFF"/>
                       </a:solidFill>
                       <a:prstDash val="solid"/>
                       <a:round/>
@@ -3034,7 +2976,7 @@
                     </a:lnT>
                     <a:lnB w="12700" cap="flat" cmpd="sng" algn="ctr">
                       <a:solidFill>
-                        <a:srgbClr val="0E1726"/>
+                        <a:srgbClr val="FFFFFF"/>
                       </a:solidFill>
                       <a:prstDash val="solid"/>
                       <a:round/>
@@ -3042,7 +2984,7 @@
                       <a:tailEnd type="none" w="med" len="med"/>
                     </a:lnB>
                     <a:solidFill>
-                      <a:srgbClr val="18243A"/>
+                      <a:srgbClr val="F1F5F9"/>
                     </a:solidFill>
                   </a:tcPr>
                 </a:tc>
@@ -3057,7 +2999,7 @@
                       <a:r>
                         <a:rPr lang="en-US" sz="1200" dirty="0">
                           <a:solidFill>
-                            <a:srgbClr val="E6EDF3"/>
+                            <a:srgbClr val="1F2937"/>
                           </a:solidFill>
                         </a:rPr>
                         <a:t>AI/LLM</a:t>
@@ -3068,7 +3010,7 @@
                   <a:tcPr marL="76200" marR="76200" marT="38100" marB="38100" anchor="ctr">
                     <a:lnL w="12700" cap="flat" cmpd="sng" algn="ctr">
                       <a:solidFill>
-                        <a:srgbClr val="0E1726"/>
+                        <a:srgbClr val="FFFFFF"/>
                       </a:solidFill>
                       <a:prstDash val="solid"/>
                       <a:round/>
@@ -3077,7 +3019,7 @@
                     </a:lnL>
                     <a:lnR w="12700" cap="flat" cmpd="sng" algn="ctr">
                       <a:solidFill>
-                        <a:srgbClr val="0E1726"/>
+                        <a:srgbClr val="FFFFFF"/>
                       </a:solidFill>
                       <a:prstDash val="solid"/>
                       <a:round/>
@@ -3086,7 +3028,7 @@
                     </a:lnR>
                     <a:lnT w="12700" cap="flat" cmpd="sng" algn="ctr">
                       <a:solidFill>
-                        <a:srgbClr val="0E1726"/>
+                        <a:srgbClr val="FFFFFF"/>
                       </a:solidFill>
                       <a:prstDash val="solid"/>
                       <a:round/>
@@ -3095,7 +3037,7 @@
                     </a:lnT>
                     <a:lnB w="12700" cap="flat" cmpd="sng" algn="ctr">
                       <a:solidFill>
-                        <a:srgbClr val="0E1726"/>
+                        <a:srgbClr val="FFFFFF"/>
                       </a:solidFill>
                       <a:prstDash val="solid"/>
                       <a:round/>
@@ -3103,7 +3045,7 @@
                       <a:tailEnd type="none" w="med" len="med"/>
                     </a:lnB>
                     <a:solidFill>
-                      <a:srgbClr val="18243A"/>
+                      <a:srgbClr val="F1F5F9"/>
                     </a:solidFill>
                   </a:tcPr>
                 </a:tc>
@@ -3118,7 +3060,7 @@
                       <a:r>
                         <a:rPr lang="en-US" sz="1200" dirty="0">
                           <a:solidFill>
-                            <a:srgbClr val="E6EDF3"/>
+                            <a:srgbClr val="1F2937"/>
                           </a:solidFill>
                         </a:rPr>
                         <a:t>prompt injection; least-privilege tools</a:t>
@@ -3129,7 +3071,7 @@
                   <a:tcPr marL="76200" marR="76200" marT="38100" marB="38100" anchor="ctr">
                     <a:lnL w="12700" cap="flat" cmpd="sng" algn="ctr">
                       <a:solidFill>
-                        <a:srgbClr val="0E1726"/>
+                        <a:srgbClr val="FFFFFF"/>
                       </a:solidFill>
                       <a:prstDash val="solid"/>
                       <a:round/>
@@ -3138,7 +3080,7 @@
                     </a:lnL>
                     <a:lnR w="12700" cap="flat" cmpd="sng" algn="ctr">
                       <a:solidFill>
-                        <a:srgbClr val="0E1726"/>
+                        <a:srgbClr val="FFFFFF"/>
                       </a:solidFill>
                       <a:prstDash val="solid"/>
                       <a:round/>
@@ -3147,7 +3089,7 @@
                     </a:lnR>
                     <a:lnT w="12700" cap="flat" cmpd="sng" algn="ctr">
                       <a:solidFill>
-                        <a:srgbClr val="0E1726"/>
+                        <a:srgbClr val="FFFFFF"/>
                       </a:solidFill>
                       <a:prstDash val="solid"/>
                       <a:round/>
@@ -3156,7 +3098,7 @@
                     </a:lnT>
                     <a:lnB w="12700" cap="flat" cmpd="sng" algn="ctr">
                       <a:solidFill>
-                        <a:srgbClr val="0E1726"/>
+                        <a:srgbClr val="FFFFFF"/>
                       </a:solidFill>
                       <a:prstDash val="solid"/>
                       <a:round/>
@@ -3164,7 +3106,7 @@
                       <a:tailEnd type="none" w="med" len="med"/>
                     </a:lnB>
                     <a:solidFill>
-                      <a:srgbClr val="18243A"/>
+                      <a:srgbClr val="F1F5F9"/>
                     </a:solidFill>
                   </a:tcPr>
                 </a:tc>
@@ -3181,7 +3123,7 @@
                       <a:r>
                         <a:rPr lang="en-US" sz="1200" dirty="0">
                           <a:solidFill>
-                            <a:srgbClr val="E6EDF3"/>
+                            <a:srgbClr val="1F2937"/>
                           </a:solidFill>
                         </a:rPr>
                         <a:t>15</a:t>
@@ -3192,7 +3134,7 @@
                   <a:tcPr marL="76200" marR="76200" marT="38100" marB="38100" anchor="ctr">
                     <a:lnL w="12700" cap="flat" cmpd="sng" algn="ctr">
                       <a:solidFill>
-                        <a:srgbClr val="0E1726"/>
+                        <a:srgbClr val="FFFFFF"/>
                       </a:solidFill>
                       <a:prstDash val="solid"/>
                       <a:round/>
@@ -3201,7 +3143,7 @@
                     </a:lnL>
                     <a:lnR w="12700" cap="flat" cmpd="sng" algn="ctr">
                       <a:solidFill>
-                        <a:srgbClr val="0E1726"/>
+                        <a:srgbClr val="FFFFFF"/>
                       </a:solidFill>
                       <a:prstDash val="solid"/>
                       <a:round/>
@@ -3210,7 +3152,7 @@
                     </a:lnR>
                     <a:lnT w="12700" cap="flat" cmpd="sng" algn="ctr">
                       <a:solidFill>
-                        <a:srgbClr val="0E1726"/>
+                        <a:srgbClr val="FFFFFF"/>
                       </a:solidFill>
                       <a:prstDash val="solid"/>
                       <a:round/>
@@ -3219,7 +3161,7 @@
                     </a:lnT>
                     <a:lnB w="12700" cap="flat" cmpd="sng" algn="ctr">
                       <a:solidFill>
-                        <a:srgbClr val="0E1726"/>
+                        <a:srgbClr val="FFFFFF"/>
                       </a:solidFill>
                       <a:prstDash val="solid"/>
                       <a:round/>
@@ -3227,7 +3169,7 @@
                       <a:tailEnd type="none" w="med" len="med"/>
                     </a:lnB>
                     <a:solidFill>
-                      <a:srgbClr val="1E2B45"/>
+                      <a:srgbClr val="E8EDF3"/>
                     </a:solidFill>
                   </a:tcPr>
                 </a:tc>
@@ -3242,7 +3184,7 @@
                       <a:r>
                         <a:rPr lang="en-US" sz="1200" dirty="0">
                           <a:solidFill>
-                            <a:srgbClr val="E6EDF3"/>
+                            <a:srgbClr val="1F2937"/>
                           </a:solidFill>
                         </a:rPr>
                         <a:t>DevSecOps</a:t>
@@ -3253,7 +3195,7 @@
                   <a:tcPr marL="76200" marR="76200" marT="38100" marB="38100" anchor="ctr">
                     <a:lnL w="12700" cap="flat" cmpd="sng" algn="ctr">
                       <a:solidFill>
-                        <a:srgbClr val="0E1726"/>
+                        <a:srgbClr val="FFFFFF"/>
                       </a:solidFill>
                       <a:prstDash val="solid"/>
                       <a:round/>
@@ -3262,7 +3204,7 @@
                     </a:lnL>
                     <a:lnR w="12700" cap="flat" cmpd="sng" algn="ctr">
                       <a:solidFill>
-                        <a:srgbClr val="0E1726"/>
+                        <a:srgbClr val="FFFFFF"/>
                       </a:solidFill>
                       <a:prstDash val="solid"/>
                       <a:round/>
@@ -3271,7 +3213,7 @@
                     </a:lnR>
                     <a:lnT w="12700" cap="flat" cmpd="sng" algn="ctr">
                       <a:solidFill>
-                        <a:srgbClr val="0E1726"/>
+                        <a:srgbClr val="FFFFFF"/>
                       </a:solidFill>
                       <a:prstDash val="solid"/>
                       <a:round/>
@@ -3280,7 +3222,7 @@
                     </a:lnT>
                     <a:lnB w="12700" cap="flat" cmpd="sng" algn="ctr">
                       <a:solidFill>
-                        <a:srgbClr val="0E1726"/>
+                        <a:srgbClr val="FFFFFF"/>
                       </a:solidFill>
                       <a:prstDash val="solid"/>
                       <a:round/>
@@ -3288,7 +3230,7 @@
                       <a:tailEnd type="none" w="med" len="med"/>
                     </a:lnB>
                     <a:solidFill>
-                      <a:srgbClr val="1E2B45"/>
+                      <a:srgbClr val="E8EDF3"/>
                     </a:solidFill>
                   </a:tcPr>
                 </a:tc>
@@ -3303,7 +3245,7 @@
                       <a:r>
                         <a:rPr lang="en-US" sz="1200" dirty="0">
                           <a:solidFill>
-                            <a:srgbClr val="E6EDF3"/>
+                            <a:srgbClr val="1F2937"/>
                           </a:solidFill>
                         </a:rPr>
                         <a:t>automated gates; fail closed</a:t>
@@ -3314,7 +3256,7 @@
                   <a:tcPr marL="76200" marR="76200" marT="38100" marB="38100" anchor="ctr">
                     <a:lnL w="12700" cap="flat" cmpd="sng" algn="ctr">
                       <a:solidFill>
-                        <a:srgbClr val="0E1726"/>
+                        <a:srgbClr val="FFFFFF"/>
                       </a:solidFill>
                       <a:prstDash val="solid"/>
                       <a:round/>
@@ -3323,7 +3265,7 @@
                     </a:lnL>
                     <a:lnR w="12700" cap="flat" cmpd="sng" algn="ctr">
                       <a:solidFill>
-                        <a:srgbClr val="0E1726"/>
+                        <a:srgbClr val="FFFFFF"/>
                       </a:solidFill>
                       <a:prstDash val="solid"/>
                       <a:round/>
@@ -3332,7 +3274,7 @@
                     </a:lnR>
                     <a:lnT w="12700" cap="flat" cmpd="sng" algn="ctr">
                       <a:solidFill>
-                        <a:srgbClr val="0E1726"/>
+                        <a:srgbClr val="FFFFFF"/>
                       </a:solidFill>
                       <a:prstDash val="solid"/>
                       <a:round/>
@@ -3341,7 +3283,7 @@
                     </a:lnT>
                     <a:lnB w="12700" cap="flat" cmpd="sng" algn="ctr">
                       <a:solidFill>
-                        <a:srgbClr val="0E1726"/>
+                        <a:srgbClr val="FFFFFF"/>
                       </a:solidFill>
                       <a:prstDash val="solid"/>
                       <a:round/>
@@ -3349,7 +3291,7 @@
                       <a:tailEnd type="none" w="med" len="med"/>
                     </a:lnB>
                     <a:solidFill>
-                      <a:srgbClr val="1E2B45"/>
+                      <a:srgbClr val="E8EDF3"/>
                     </a:solidFill>
                   </a:tcPr>
                 </a:tc>
@@ -3385,7 +3327,7 @@
             <a:r>
               <a:rPr lang="en-US" sz="900" dirty="0">
                 <a:solidFill>
-                  <a:srgbClr val="94A3B8"/>
+                  <a:srgbClr val="64748B"/>
                 </a:solidFill>
                 <a:latin typeface="Calibri" pitchFamily="34" charset="0"/>
                 <a:ea typeface="Calibri" pitchFamily="34" charset="-122"/>
@@ -3397,38 +3339,9 @@
           </a:p>
         </p:txBody>
       </p:sp>
-      <p:sp>
-        <p:nvSpPr>
-          <p:cNvPr id="7" name="Shape 3"/>
-          <p:cNvSpPr/>
-          <p:nvPr/>
-        </p:nvSpPr>
-        <p:spPr>
-          <a:xfrm>
-            <a:off x="7772400" y="4590288"/>
-            <a:ext cx="969264" cy="475488"/>
-          </a:xfrm>
-          <a:prstGeom prst="roundRect">
-            <a:avLst>
-              <a:gd name="adj" fmla="val 11538"/>
-            </a:avLst>
-          </a:prstGeom>
-          <a:solidFill>
-            <a:srgbClr val="FFFFFF"/>
-          </a:solidFill>
-          <a:ln/>
-          <a:effectLst>
-            <a:outerShdw sx="100000" sy="100000" kx="0" ky="0" algn="bl" rotWithShape="0" blurRad="101600" dist="38100" dir="5400000">
-              <a:srgbClr val="000000">
-                <a:alpha val="35000"/>
-              </a:srgbClr>
-            </a:outerShdw>
-          </a:effectLst>
-        </p:spPr>
-      </p:sp>
       <p:pic>
         <p:nvPicPr>
-          <p:cNvPr id="8" name="Image 1" descr="/Users/pop7/Library/CloudStorage/OneDrive-MonsterConnectCo.,Ltd/Lecture/KOSEN69 - software-security/slides/pptx/assets/logo-small.png">    </p:cNvPr>
+          <p:cNvPr id="7" name="Image 1" descr="/Users/pop7/Library/CloudStorage/OneDrive-MonsterConnectCo.,Ltd/Lecture/KOSEN69 - software-security/slides/pptx/assets/logo-small.png">    </p:cNvPr>
           <p:cNvPicPr>
             <a:picLocks noChangeAspect="1"/>
           </p:cNvPicPr>
@@ -3442,7 +3355,7 @@
         </p:blipFill>
         <p:spPr>
           <a:xfrm>
-            <a:off x="7872984" y="4681728"/>
+            <a:off x="7882128" y="4700016"/>
             <a:ext cx="768096" cy="356616"/>
           </a:xfrm>
           <a:prstGeom prst="rect">
@@ -3464,7 +3377,7 @@
     <p:bg>
       <p:bgPr>
         <a:solidFill>
-          <a:srgbClr val="0E1726"/>
+          <a:srgbClr val="FFFFFF"/>
         </a:solidFill>
       </p:bgPr>
     </p:bg>
@@ -3501,9 +3414,9 @@
           </a:solidFill>
           <a:ln/>
           <a:effectLst>
-            <a:outerShdw sx="100000" sy="100000" kx="0" ky="0" algn="bl" rotWithShape="0" blurRad="101600" dist="38100" dir="5400000">
+            <a:outerShdw sx="100000" sy="100000" kx="0" ky="0" algn="bl" rotWithShape="0" blurRad="76200" dist="25400" dir="5400000">
               <a:srgbClr val="000000">
-                <a:alpha val="35000"/>
+                <a:alpha val="12000"/>
               </a:srgbClr>
             </a:outerShdw>
           </a:effectLst>
@@ -3560,7 +3473,7 @@
             <a:r>
               <a:rPr lang="en-US" sz="2600" b="1" dirty="0">
                 <a:solidFill>
-                  <a:srgbClr val="E6EDF3"/>
+                  <a:srgbClr val="1F2937"/>
                 </a:solidFill>
                 <a:latin typeface="Arial" pitchFamily="34" charset="0"/>
                 <a:ea typeface="Arial" pitchFamily="34" charset="-122"/>
@@ -3599,7 +3512,7 @@
             <a:r>
               <a:rPr lang="en-US" sz="1400" dirty="0">
                 <a:solidFill>
-                  <a:srgbClr val="E6EDF3"/>
+                  <a:srgbClr val="1F2937"/>
                 </a:solidFill>
                 <a:latin typeface="Calibri" pitchFamily="34" charset="0"/>
                 <a:ea typeface="Calibri" pitchFamily="34" charset="-122"/>
@@ -3664,7 +3577,7 @@
                   <a:tcPr marL="76200" marR="76200" marT="38100" marB="38100" anchor="ctr">
                     <a:lnL w="12700" cap="flat" cmpd="sng" algn="ctr">
                       <a:solidFill>
-                        <a:srgbClr val="0E1726"/>
+                        <a:srgbClr val="FFFFFF"/>
                       </a:solidFill>
                       <a:prstDash val="solid"/>
                       <a:round/>
@@ -3673,7 +3586,7 @@
                     </a:lnL>
                     <a:lnR w="12700" cap="flat" cmpd="sng" algn="ctr">
                       <a:solidFill>
-                        <a:srgbClr val="0E1726"/>
+                        <a:srgbClr val="FFFFFF"/>
                       </a:solidFill>
                       <a:prstDash val="solid"/>
                       <a:round/>
@@ -3682,7 +3595,7 @@
                     </a:lnR>
                     <a:lnT w="12700" cap="flat" cmpd="sng" algn="ctr">
                       <a:solidFill>
-                        <a:srgbClr val="0E1726"/>
+                        <a:srgbClr val="FFFFFF"/>
                       </a:solidFill>
                       <a:prstDash val="solid"/>
                       <a:round/>
@@ -3691,7 +3604,7 @@
                     </a:lnT>
                     <a:lnB w="12700" cap="flat" cmpd="sng" algn="ctr">
                       <a:solidFill>
-                        <a:srgbClr val="0E1726"/>
+                        <a:srgbClr val="FFFFFF"/>
                       </a:solidFill>
                       <a:prstDash val="solid"/>
                       <a:round/>
@@ -3725,7 +3638,7 @@
                   <a:tcPr marL="76200" marR="76200" marT="38100" marB="38100" anchor="ctr">
                     <a:lnL w="12700" cap="flat" cmpd="sng" algn="ctr">
                       <a:solidFill>
-                        <a:srgbClr val="0E1726"/>
+                        <a:srgbClr val="FFFFFF"/>
                       </a:solidFill>
                       <a:prstDash val="solid"/>
                       <a:round/>
@@ -3734,7 +3647,7 @@
                     </a:lnL>
                     <a:lnR w="12700" cap="flat" cmpd="sng" algn="ctr">
                       <a:solidFill>
-                        <a:srgbClr val="0E1726"/>
+                        <a:srgbClr val="FFFFFF"/>
                       </a:solidFill>
                       <a:prstDash val="solid"/>
                       <a:round/>
@@ -3743,7 +3656,7 @@
                     </a:lnR>
                     <a:lnT w="12700" cap="flat" cmpd="sng" algn="ctr">
                       <a:solidFill>
-                        <a:srgbClr val="0E1726"/>
+                        <a:srgbClr val="FFFFFF"/>
                       </a:solidFill>
                       <a:prstDash val="solid"/>
                       <a:round/>
@@ -3752,7 +3665,7 @@
                     </a:lnT>
                     <a:lnB w="12700" cap="flat" cmpd="sng" algn="ctr">
                       <a:solidFill>
-                        <a:srgbClr val="0E1726"/>
+                        <a:srgbClr val="FFFFFF"/>
                       </a:solidFill>
                       <a:prstDash val="solid"/>
                       <a:round/>
@@ -3786,7 +3699,7 @@
                   <a:tcPr marL="76200" marR="76200" marT="38100" marB="38100" anchor="ctr">
                     <a:lnL w="12700" cap="flat" cmpd="sng" algn="ctr">
                       <a:solidFill>
-                        <a:srgbClr val="0E1726"/>
+                        <a:srgbClr val="FFFFFF"/>
                       </a:solidFill>
                       <a:prstDash val="solid"/>
                       <a:round/>
@@ -3795,7 +3708,7 @@
                     </a:lnL>
                     <a:lnR w="12700" cap="flat" cmpd="sng" algn="ctr">
                       <a:solidFill>
-                        <a:srgbClr val="0E1726"/>
+                        <a:srgbClr val="FFFFFF"/>
                       </a:solidFill>
                       <a:prstDash val="solid"/>
                       <a:round/>
@@ -3804,7 +3717,7 @@
                     </a:lnR>
                     <a:lnT w="12700" cap="flat" cmpd="sng" algn="ctr">
                       <a:solidFill>
-                        <a:srgbClr val="0E1726"/>
+                        <a:srgbClr val="FFFFFF"/>
                       </a:solidFill>
                       <a:prstDash val="solid"/>
                       <a:round/>
@@ -3813,7 +3726,7 @@
                     </a:lnT>
                     <a:lnB w="12700" cap="flat" cmpd="sng" algn="ctr">
                       <a:solidFill>
-                        <a:srgbClr val="0E1726"/>
+                        <a:srgbClr val="FFFFFF"/>
                       </a:solidFill>
                       <a:prstDash val="solid"/>
                       <a:round/>
@@ -3847,7 +3760,7 @@
                   <a:tcPr marL="76200" marR="76200" marT="38100" marB="38100" anchor="ctr">
                     <a:lnL w="12700" cap="flat" cmpd="sng" algn="ctr">
                       <a:solidFill>
-                        <a:srgbClr val="0E1726"/>
+                        <a:srgbClr val="FFFFFF"/>
                       </a:solidFill>
                       <a:prstDash val="solid"/>
                       <a:round/>
@@ -3856,7 +3769,7 @@
                     </a:lnL>
                     <a:lnR w="12700" cap="flat" cmpd="sng" algn="ctr">
                       <a:solidFill>
-                        <a:srgbClr val="0E1726"/>
+                        <a:srgbClr val="FFFFFF"/>
                       </a:solidFill>
                       <a:prstDash val="solid"/>
                       <a:round/>
@@ -3865,7 +3778,7 @@
                     </a:lnR>
                     <a:lnT w="12700" cap="flat" cmpd="sng" algn="ctr">
                       <a:solidFill>
-                        <a:srgbClr val="0E1726"/>
+                        <a:srgbClr val="FFFFFF"/>
                       </a:solidFill>
                       <a:prstDash val="solid"/>
                       <a:round/>
@@ -3874,7 +3787,7 @@
                     </a:lnT>
                     <a:lnB w="12700" cap="flat" cmpd="sng" algn="ctr">
                       <a:solidFill>
-                        <a:srgbClr val="0E1726"/>
+                        <a:srgbClr val="FFFFFF"/>
                       </a:solidFill>
                       <a:prstDash val="solid"/>
                       <a:round/>
@@ -3908,7 +3821,7 @@
                   <a:tcPr marL="76200" marR="76200" marT="38100" marB="38100" anchor="ctr">
                     <a:lnL w="12700" cap="flat" cmpd="sng" algn="ctr">
                       <a:solidFill>
-                        <a:srgbClr val="0E1726"/>
+                        <a:srgbClr val="FFFFFF"/>
                       </a:solidFill>
                       <a:prstDash val="solid"/>
                       <a:round/>
@@ -3917,7 +3830,7 @@
                     </a:lnL>
                     <a:lnR w="12700" cap="flat" cmpd="sng" algn="ctr">
                       <a:solidFill>
-                        <a:srgbClr val="0E1726"/>
+                        <a:srgbClr val="FFFFFF"/>
                       </a:solidFill>
                       <a:prstDash val="solid"/>
                       <a:round/>
@@ -3926,7 +3839,7 @@
                     </a:lnR>
                     <a:lnT w="12700" cap="flat" cmpd="sng" algn="ctr">
                       <a:solidFill>
-                        <a:srgbClr val="0E1726"/>
+                        <a:srgbClr val="FFFFFF"/>
                       </a:solidFill>
                       <a:prstDash val="solid"/>
                       <a:round/>
@@ -3935,7 +3848,7 @@
                     </a:lnT>
                     <a:lnB w="12700" cap="flat" cmpd="sng" algn="ctr">
                       <a:solidFill>
-                        <a:srgbClr val="0E1726"/>
+                        <a:srgbClr val="FFFFFF"/>
                       </a:solidFill>
                       <a:prstDash val="solid"/>
                       <a:round/>
@@ -3969,7 +3882,7 @@
                   <a:tcPr marL="76200" marR="76200" marT="38100" marB="38100" anchor="ctr">
                     <a:lnL w="12700" cap="flat" cmpd="sng" algn="ctr">
                       <a:solidFill>
-                        <a:srgbClr val="0E1726"/>
+                        <a:srgbClr val="FFFFFF"/>
                       </a:solidFill>
                       <a:prstDash val="solid"/>
                       <a:round/>
@@ -3978,7 +3891,7 @@
                     </a:lnL>
                     <a:lnR w="12700" cap="flat" cmpd="sng" algn="ctr">
                       <a:solidFill>
-                        <a:srgbClr val="0E1726"/>
+                        <a:srgbClr val="FFFFFF"/>
                       </a:solidFill>
                       <a:prstDash val="solid"/>
                       <a:round/>
@@ -3987,7 +3900,7 @@
                     </a:lnR>
                     <a:lnT w="12700" cap="flat" cmpd="sng" algn="ctr">
                       <a:solidFill>
-                        <a:srgbClr val="0E1726"/>
+                        <a:srgbClr val="FFFFFF"/>
                       </a:solidFill>
                       <a:prstDash val="solid"/>
                       <a:round/>
@@ -3996,7 +3909,7 @@
                     </a:lnT>
                     <a:lnB w="12700" cap="flat" cmpd="sng" algn="ctr">
                       <a:solidFill>
-                        <a:srgbClr val="0E1726"/>
+                        <a:srgbClr val="FFFFFF"/>
                       </a:solidFill>
                       <a:prstDash val="solid"/>
                       <a:round/>
@@ -4040,7 +3953,7 @@
             <a:r>
               <a:rPr lang="en-US" sz="900" dirty="0">
                 <a:solidFill>
-                  <a:srgbClr val="94A3B8"/>
+                  <a:srgbClr val="64748B"/>
                 </a:solidFill>
                 <a:latin typeface="Calibri" pitchFamily="34" charset="0"/>
                 <a:ea typeface="Calibri" pitchFamily="34" charset="-122"/>
@@ -4052,38 +3965,9 @@
           </a:p>
         </p:txBody>
       </p:sp>
-      <p:sp>
-        <p:nvSpPr>
-          <p:cNvPr id="8" name="Shape 4"/>
-          <p:cNvSpPr/>
-          <p:nvPr/>
-        </p:nvSpPr>
-        <p:spPr>
-          <a:xfrm>
-            <a:off x="7772400" y="4590288"/>
-            <a:ext cx="969264" cy="475488"/>
-          </a:xfrm>
-          <a:prstGeom prst="roundRect">
-            <a:avLst>
-              <a:gd name="adj" fmla="val 11538"/>
-            </a:avLst>
-          </a:prstGeom>
-          <a:solidFill>
-            <a:srgbClr val="FFFFFF"/>
-          </a:solidFill>
-          <a:ln/>
-          <a:effectLst>
-            <a:outerShdw sx="100000" sy="100000" kx="0" ky="0" algn="bl" rotWithShape="0" blurRad="101600" dist="38100" dir="5400000">
-              <a:srgbClr val="000000">
-                <a:alpha val="35000"/>
-              </a:srgbClr>
-            </a:outerShdw>
-          </a:effectLst>
-        </p:spPr>
-      </p:sp>
       <p:pic>
         <p:nvPicPr>
-          <p:cNvPr id="9" name="Image 1" descr="/Users/pop7/Library/CloudStorage/OneDrive-MonsterConnectCo.,Ltd/Lecture/KOSEN69 - software-security/slides/pptx/assets/logo-small.png">    </p:cNvPr>
+          <p:cNvPr id="8" name="Image 1" descr="/Users/pop7/Library/CloudStorage/OneDrive-MonsterConnectCo.,Ltd/Lecture/KOSEN69 - software-security/slides/pptx/assets/logo-small.png">    </p:cNvPr>
           <p:cNvPicPr>
             <a:picLocks noChangeAspect="1"/>
           </p:cNvPicPr>
@@ -4097,7 +3981,7 @@
         </p:blipFill>
         <p:spPr>
           <a:xfrm>
-            <a:off x="7872984" y="4681728"/>
+            <a:off x="7882128" y="4700016"/>
             <a:ext cx="768096" cy="356616"/>
           </a:xfrm>
           <a:prstGeom prst="rect">
@@ -4119,7 +4003,7 @@
     <p:bg>
       <p:bgPr>
         <a:solidFill>
-          <a:srgbClr val="0E1726"/>
+          <a:srgbClr val="FFFFFF"/>
         </a:solidFill>
       </p:bgPr>
     </p:bg>
@@ -4156,9 +4040,9 @@
           </a:solidFill>
           <a:ln/>
           <a:effectLst>
-            <a:outerShdw sx="100000" sy="100000" kx="0" ky="0" algn="bl" rotWithShape="0" blurRad="101600" dist="38100" dir="5400000">
+            <a:outerShdw sx="100000" sy="100000" kx="0" ky="0" algn="bl" rotWithShape="0" blurRad="76200" dist="25400" dir="5400000">
               <a:srgbClr val="000000">
-                <a:alpha val="35000"/>
+                <a:alpha val="12000"/>
               </a:srgbClr>
             </a:outerShdw>
           </a:effectLst>
@@ -4215,7 +4099,7 @@
             <a:r>
               <a:rPr lang="en-US" sz="2600" b="1" dirty="0">
                 <a:solidFill>
-                  <a:srgbClr val="E6EDF3"/>
+                  <a:srgbClr val="1F2937"/>
                 </a:solidFill>
                 <a:latin typeface="Arial" pitchFamily="34" charset="0"/>
                 <a:ea typeface="Arial" pitchFamily="34" charset="-122"/>
@@ -4254,7 +4138,7 @@
             <a:r>
               <a:rPr lang="en-US" sz="1400" dirty="0">
                 <a:solidFill>
-                  <a:srgbClr val="E6EDF3"/>
+                  <a:srgbClr val="1F2937"/>
                 </a:solidFill>
                 <a:latin typeface="Calibri" pitchFamily="34" charset="0"/>
                 <a:ea typeface="Calibri" pitchFamily="34" charset="-122"/>
@@ -4283,13 +4167,13 @@
             </a:avLst>
           </a:prstGeom>
           <a:solidFill>
-            <a:srgbClr val="18243A"/>
+            <a:srgbClr val="F1F5F9"/>
           </a:solidFill>
           <a:ln/>
           <a:effectLst>
-            <a:outerShdw sx="100000" sy="100000" kx="0" ky="0" algn="bl" rotWithShape="0" blurRad="101600" dist="38100" dir="5400000">
+            <a:outerShdw sx="100000" sy="100000" kx="0" ky="0" algn="bl" rotWithShape="0" blurRad="76200" dist="25400" dir="5400000">
               <a:srgbClr val="000000">
-                <a:alpha val="35000"/>
+                <a:alpha val="12000"/>
               </a:srgbClr>
             </a:outerShdw>
           </a:effectLst>
@@ -4326,7 +4210,7 @@
             <a:r>
               <a:rPr lang="en-US" sz="1400" dirty="0">
                 <a:solidFill>
-                  <a:srgbClr val="E6EDF3"/>
+                  <a:srgbClr val="1F2937"/>
                 </a:solidFill>
                 <a:latin typeface="Calibri" pitchFamily="34" charset="0"/>
                 <a:ea typeface="Calibri" pitchFamily="34" charset="-122"/>
@@ -4347,7 +4231,7 @@
             <a:r>
               <a:rPr lang="en-US" sz="1400" dirty="0">
                 <a:solidFill>
-                  <a:srgbClr val="E6EDF3"/>
+                  <a:srgbClr val="1F2937"/>
                 </a:solidFill>
                 <a:latin typeface="Calibri" pitchFamily="34" charset="0"/>
                 <a:ea typeface="Calibri" pitchFamily="34" charset="-122"/>
@@ -4386,7 +4270,7 @@
             <a:r>
               <a:rPr lang="en-US" sz="900" dirty="0">
                 <a:solidFill>
-                  <a:srgbClr val="94A3B8"/>
+                  <a:srgbClr val="64748B"/>
                 </a:solidFill>
                 <a:latin typeface="Calibri" pitchFamily="34" charset="0"/>
                 <a:ea typeface="Calibri" pitchFamily="34" charset="-122"/>
@@ -4398,38 +4282,9 @@
           </a:p>
         </p:txBody>
       </p:sp>
-      <p:sp>
-        <p:nvSpPr>
-          <p:cNvPr id="9" name="Shape 6"/>
-          <p:cNvSpPr/>
-          <p:nvPr/>
-        </p:nvSpPr>
-        <p:spPr>
-          <a:xfrm>
-            <a:off x="7772400" y="4590288"/>
-            <a:ext cx="969264" cy="475488"/>
-          </a:xfrm>
-          <a:prstGeom prst="roundRect">
-            <a:avLst>
-              <a:gd name="adj" fmla="val 11538"/>
-            </a:avLst>
-          </a:prstGeom>
-          <a:solidFill>
-            <a:srgbClr val="FFFFFF"/>
-          </a:solidFill>
-          <a:ln/>
-          <a:effectLst>
-            <a:outerShdw sx="100000" sy="100000" kx="0" ky="0" algn="bl" rotWithShape="0" blurRad="101600" dist="38100" dir="5400000">
-              <a:srgbClr val="000000">
-                <a:alpha val="35000"/>
-              </a:srgbClr>
-            </a:outerShdw>
-          </a:effectLst>
-        </p:spPr>
-      </p:sp>
       <p:pic>
         <p:nvPicPr>
-          <p:cNvPr id="10" name="Image 1" descr="/Users/pop7/Library/CloudStorage/OneDrive-MonsterConnectCo.,Ltd/Lecture/KOSEN69 - software-security/slides/pptx/assets/logo-small.png">    </p:cNvPr>
+          <p:cNvPr id="9" name="Image 1" descr="/Users/pop7/Library/CloudStorage/OneDrive-MonsterConnectCo.,Ltd/Lecture/KOSEN69 - software-security/slides/pptx/assets/logo-small.png">    </p:cNvPr>
           <p:cNvPicPr>
             <a:picLocks noChangeAspect="1"/>
           </p:cNvPicPr>
@@ -4443,7 +4298,7 @@
         </p:blipFill>
         <p:spPr>
           <a:xfrm>
-            <a:off x="7872984" y="4681728"/>
+            <a:off x="7882128" y="4700016"/>
             <a:ext cx="768096" cy="356616"/>
           </a:xfrm>
           <a:prstGeom prst="rect">
@@ -4465,7 +4320,7 @@
     <p:bg>
       <p:bgPr>
         <a:solidFill>
-          <a:srgbClr val="0E1726"/>
+          <a:srgbClr val="FFFFFF"/>
         </a:solidFill>
       </p:bgPr>
     </p:bg>
@@ -4502,9 +4357,9 @@
           </a:solidFill>
           <a:ln/>
           <a:effectLst>
-            <a:outerShdw sx="100000" sy="100000" kx="0" ky="0" algn="bl" rotWithShape="0" blurRad="101600" dist="38100" dir="5400000">
+            <a:outerShdw sx="100000" sy="100000" kx="0" ky="0" algn="bl" rotWithShape="0" blurRad="76200" dist="25400" dir="5400000">
               <a:srgbClr val="000000">
-                <a:alpha val="35000"/>
+                <a:alpha val="12000"/>
               </a:srgbClr>
             </a:outerShdw>
           </a:effectLst>
@@ -4561,7 +4416,7 @@
             <a:r>
               <a:rPr lang="en-US" sz="2600" b="1" dirty="0">
                 <a:solidFill>
-                  <a:srgbClr val="E6EDF3"/>
+                  <a:srgbClr val="1F2937"/>
                 </a:solidFill>
                 <a:latin typeface="Arial" pitchFamily="34" charset="0"/>
                 <a:ea typeface="Arial" pitchFamily="34" charset="-122"/>
@@ -4590,13 +4445,13 @@
             </a:avLst>
           </a:prstGeom>
           <a:solidFill>
-            <a:srgbClr val="18243A"/>
+            <a:srgbClr val="F1F5F9"/>
           </a:solidFill>
           <a:ln/>
           <a:effectLst>
-            <a:outerShdw sx="100000" sy="100000" kx="0" ky="0" algn="bl" rotWithShape="0" blurRad="101600" dist="38100" dir="5400000">
+            <a:outerShdw sx="100000" sy="100000" kx="0" ky="0" algn="bl" rotWithShape="0" blurRad="76200" dist="25400" dir="5400000">
               <a:srgbClr val="000000">
-                <a:alpha val="35000"/>
+                <a:alpha val="12000"/>
               </a:srgbClr>
             </a:outerShdw>
           </a:effectLst>
@@ -4633,7 +4488,7 @@
             <a:r>
               <a:rPr lang="en-US" sz="1400" dirty="0">
                 <a:solidFill>
-                  <a:srgbClr val="E6EDF3"/>
+                  <a:srgbClr val="1F2937"/>
                 </a:solidFill>
                 <a:latin typeface="Calibri" pitchFamily="34" charset="0"/>
                 <a:ea typeface="Calibri" pitchFamily="34" charset="-122"/>
@@ -4654,7 +4509,7 @@
             <a:r>
               <a:rPr lang="en-US" sz="1400" dirty="0">
                 <a:solidFill>
-                  <a:srgbClr val="E6EDF3"/>
+                  <a:srgbClr val="1F2937"/>
                 </a:solidFill>
                 <a:latin typeface="Calibri" pitchFamily="34" charset="0"/>
                 <a:ea typeface="Calibri" pitchFamily="34" charset="-122"/>
@@ -4693,7 +4548,7 @@
             <a:r>
               <a:rPr lang="en-US" sz="900" dirty="0">
                 <a:solidFill>
-                  <a:srgbClr val="94A3B8"/>
+                  <a:srgbClr val="64748B"/>
                 </a:solidFill>
                 <a:latin typeface="Calibri" pitchFamily="34" charset="0"/>
                 <a:ea typeface="Calibri" pitchFamily="34" charset="-122"/>
@@ -4705,38 +4560,9 @@
           </a:p>
         </p:txBody>
       </p:sp>
-      <p:sp>
-        <p:nvSpPr>
-          <p:cNvPr id="8" name="Shape 5"/>
-          <p:cNvSpPr/>
-          <p:nvPr/>
-        </p:nvSpPr>
-        <p:spPr>
-          <a:xfrm>
-            <a:off x="7772400" y="4590288"/>
-            <a:ext cx="969264" cy="475488"/>
-          </a:xfrm>
-          <a:prstGeom prst="roundRect">
-            <a:avLst>
-              <a:gd name="adj" fmla="val 11538"/>
-            </a:avLst>
-          </a:prstGeom>
-          <a:solidFill>
-            <a:srgbClr val="FFFFFF"/>
-          </a:solidFill>
-          <a:ln/>
-          <a:effectLst>
-            <a:outerShdw sx="100000" sy="100000" kx="0" ky="0" algn="bl" rotWithShape="0" blurRad="101600" dist="38100" dir="5400000">
-              <a:srgbClr val="000000">
-                <a:alpha val="35000"/>
-              </a:srgbClr>
-            </a:outerShdw>
-          </a:effectLst>
-        </p:spPr>
-      </p:sp>
       <p:pic>
         <p:nvPicPr>
-          <p:cNvPr id="9" name="Image 1" descr="/Users/pop7/Library/CloudStorage/OneDrive-MonsterConnectCo.,Ltd/Lecture/KOSEN69 - software-security/slides/pptx/assets/logo-small.png">    </p:cNvPr>
+          <p:cNvPr id="8" name="Image 1" descr="/Users/pop7/Library/CloudStorage/OneDrive-MonsterConnectCo.,Ltd/Lecture/KOSEN69 - software-security/slides/pptx/assets/logo-small.png">    </p:cNvPr>
           <p:cNvPicPr>
             <a:picLocks noChangeAspect="1"/>
           </p:cNvPicPr>
@@ -4750,7 +4576,7 @@
         </p:blipFill>
         <p:spPr>
           <a:xfrm>
-            <a:off x="7872984" y="4681728"/>
+            <a:off x="7882128" y="4700016"/>
             <a:ext cx="768096" cy="356616"/>
           </a:xfrm>
           <a:prstGeom prst="rect">
@@ -4772,7 +4598,7 @@
     <p:bg>
       <p:bgPr>
         <a:solidFill>
-          <a:srgbClr val="0E1726"/>
+          <a:srgbClr val="FFFFFF"/>
         </a:solidFill>
       </p:bgPr>
     </p:bg>
@@ -4817,7 +4643,7 @@
             <a:r>
               <a:rPr lang="en-US" sz="4600" b="1" dirty="0">
                 <a:solidFill>
-                  <a:srgbClr val="E6EDF3"/>
+                  <a:srgbClr val="1F2937"/>
                 </a:solidFill>
                 <a:latin typeface="Arial" pitchFamily="34" charset="0"/>
                 <a:ea typeface="Arial" pitchFamily="34" charset="-122"/>
@@ -4868,38 +4694,9 @@
           </a:p>
         </p:txBody>
       </p:sp>
-      <p:sp>
-        <p:nvSpPr>
-          <p:cNvPr id="4" name="Shape 2"/>
-          <p:cNvSpPr/>
-          <p:nvPr/>
-        </p:nvSpPr>
-        <p:spPr>
-          <a:xfrm>
-            <a:off x="7772400" y="4590288"/>
-            <a:ext cx="969264" cy="475488"/>
-          </a:xfrm>
-          <a:prstGeom prst="roundRect">
-            <a:avLst>
-              <a:gd name="adj" fmla="val 11538"/>
-            </a:avLst>
-          </a:prstGeom>
-          <a:solidFill>
-            <a:srgbClr val="FFFFFF"/>
-          </a:solidFill>
-          <a:ln/>
-          <a:effectLst>
-            <a:outerShdw sx="100000" sy="100000" kx="0" ky="0" algn="bl" rotWithShape="0" blurRad="101600" dist="38100" dir="5400000">
-              <a:srgbClr val="000000">
-                <a:alpha val="35000"/>
-              </a:srgbClr>
-            </a:outerShdw>
-          </a:effectLst>
-        </p:spPr>
-      </p:sp>
       <p:pic>
         <p:nvPicPr>
-          <p:cNvPr id="5" name="Image 0" descr="/Users/pop7/Library/CloudStorage/OneDrive-MonsterConnectCo.,Ltd/Lecture/KOSEN69 - software-security/slides/pptx/assets/logo-small.png">    </p:cNvPr>
+          <p:cNvPr id="4" name="Image 0" descr="/Users/pop7/Library/CloudStorage/OneDrive-MonsterConnectCo.,Ltd/Lecture/KOSEN69 - software-security/slides/pptx/assets/logo-small.png">    </p:cNvPr>
           <p:cNvPicPr>
             <a:picLocks noChangeAspect="1"/>
           </p:cNvPicPr>
@@ -4913,7 +4710,7 @@
         </p:blipFill>
         <p:spPr>
           <a:xfrm>
-            <a:off x="7872984" y="4681728"/>
+            <a:off x="7882128" y="4700016"/>
             <a:ext cx="768096" cy="356616"/>
           </a:xfrm>
           <a:prstGeom prst="rect">

--- a/slides/pptx/week17.pptx
+++ b/slides/pptx/week17.pptx
@@ -508,7 +508,7 @@
           <a:p>
             <a:r>
               <a:rPr lang="en-US" dirty="0"/>
-              <a:t/>
+              <a:t>Same energy as W7 — game, not lecture. Frame: consolidate the modern stack + a few first-half callbacks; zero surprises for the final. ~2 min.</a:t>
             </a:r>
             <a:endParaRPr lang="en-US" dirty="0"/>
           </a:p>
@@ -596,7 +596,7 @@
           <a:p>
             <a:r>
               <a:rPr lang="en-US" dirty="0"/>
-              <a:t/>
+              <a:t>Roadmap. Open with the cumulative review quiz (quiz2.md, 25 pts) per AGENDA, then the games.</a:t>
             </a:r>
             <a:endParaRPr lang="en-US" dirty="0"/>
           </a:p>
@@ -684,7 +684,7 @@
           <a:p>
             <a:r>
               <a:rPr lang="en-US" dirty="0"/>
-              <a:t/>
+              <a:t>Cold-call one student per row for the one-liner (retrieval). Add 2–3 first-half callbacks (injection, auth) since the final is cumulative. ~10 min.</a:t>
             </a:r>
             <a:endParaRPr lang="en-US" dirty="0"/>
           </a:p>
@@ -772,7 +772,7 @@
           <a:p>
             <a:r>
               <a:rPr lang="en-US" dirty="0"/>
-              <a:t/>
+              <a:t>Same run as W7 but whole-course. Seed questions from exams/item-bank.md (final pool). Teams = Houses; Final-Jeopardy wager; points to the CTFd board. ~60–75 min.</a:t>
             </a:r>
             <a:endParaRPr lang="en-US" dirty="0"/>
           </a:p>
@@ -860,7 +860,7 @@
           <a:p>
             <a:r>
               <a:rPr lang="en-US" dirty="0"/>
-              <a:t/>
+              <a:t>Run the EXACT W19 team format (mock-ctf.md / CTF pool), incl. a binary (toolbox container) + LLM challenge so nothing is new on final day. ~90 min.</a:t>
             </a:r>
             <a:endParaRPr lang="en-US" dirty="0"/>
           </a:p>
@@ -948,7 +948,7 @@
           <a:p>
             <a:r>
               <a:rPr lang="en-US" dirty="0"/>
-              <a:t/>
+              <a:t>State scope + logistics clearly. Remind teams the W19 demo is graded — bring a runnable project. ~3 min.</a:t>
             </a:r>
             <a:endParaRPr lang="en-US" dirty="0"/>
           </a:p>
@@ -1036,7 +1036,7 @@
           <a:p>
             <a:r>
               <a:rPr lang="en-US" dirty="0"/>
-              <a:t/>
+              <a:t>Close: checklist of what to bring to W19; confirm project repos run.</a:t>
             </a:r>
             <a:endParaRPr lang="en-US" dirty="0"/>
           </a:p>
